--- a/files/KIE4031_Traffic_RF_Slide.pptx
+++ b/files/KIE4031_Traffic_RF_Slide.pptx
@@ -7,26 +7,25 @@
   <p:sldIdLst>
     <p:sldId id="256" r:id="rId2"/>
     <p:sldId id="257" r:id="rId3"/>
-    <p:sldId id="258" r:id="rId4"/>
-    <p:sldId id="259" r:id="rId5"/>
-    <p:sldId id="260" r:id="rId6"/>
-    <p:sldId id="261" r:id="rId7"/>
-    <p:sldId id="262" r:id="rId8"/>
+    <p:sldId id="259" r:id="rId4"/>
+    <p:sldId id="260" r:id="rId5"/>
+    <p:sldId id="261" r:id="rId6"/>
+    <p:sldId id="262" r:id="rId7"/>
   </p:sldIdLst>
   <p:sldSz cx="18288000" cy="10287000"/>
   <p:notesSz cx="6858000" cy="9144000"/>
   <p:embeddedFontLst>
     <p:embeddedFont>
       <p:font typeface="Cheddar" panose="020B0604020202020204" charset="0"/>
+      <p:regular r:id="rId8"/>
+    </p:embeddedFont>
+    <p:embeddedFont>
+      <p:font typeface="Telegraf 1" panose="020B0604020202020204" charset="0"/>
       <p:regular r:id="rId9"/>
     </p:embeddedFont>
     <p:embeddedFont>
-      <p:font typeface="Telegraf 1" panose="020B0604020202020204" charset="0"/>
+      <p:font typeface="Telegraf 1 Bold" panose="020B0604020202020204" charset="0"/>
       <p:regular r:id="rId10"/>
-    </p:embeddedFont>
-    <p:embeddedFont>
-      <p:font typeface="Telegraf 1 Bold" panose="020B0604020202020204" charset="0"/>
-      <p:regular r:id="rId11"/>
     </p:embeddedFont>
   </p:embeddedFontLst>
   <p:defaultTextStyle>
@@ -5543,1005 +5542,6 @@
           <a:chExt cx="0" cy="0"/>
         </a:xfrm>
       </p:grpSpPr>
-      <p:grpSp>
-        <p:nvGrpSpPr>
-          <p:cNvPr id="2" name="Group 2"/>
-          <p:cNvGrpSpPr/>
-          <p:nvPr/>
-        </p:nvGrpSpPr>
-        <p:grpSpPr>
-          <a:xfrm>
-            <a:off x="1028700" y="1572946"/>
-            <a:ext cx="7294445" cy="803783"/>
-            <a:chOff x="0" y="0"/>
-            <a:chExt cx="1921171" cy="211696"/>
-          </a:xfrm>
-        </p:grpSpPr>
-        <p:sp>
-          <p:nvSpPr>
-            <p:cNvPr id="3" name="Freeform 3"/>
-            <p:cNvSpPr/>
-            <p:nvPr/>
-          </p:nvSpPr>
-          <p:spPr>
-            <a:xfrm>
-              <a:off x="0" y="0"/>
-              <a:ext cx="1921171" cy="211696"/>
-            </a:xfrm>
-            <a:custGeom>
-              <a:avLst/>
-              <a:gdLst/>
-              <a:ahLst/>
-              <a:cxnLst/>
-              <a:rect l="l" t="t" r="r" b="b"/>
-              <a:pathLst>
-                <a:path w="1921171" h="211696">
-                  <a:moveTo>
-                    <a:pt x="54129" y="0"/>
-                  </a:moveTo>
-                  <a:lnTo>
-                    <a:pt x="1867042" y="0"/>
-                  </a:lnTo>
-                  <a:cubicBezTo>
-                    <a:pt x="1896937" y="0"/>
-                    <a:pt x="1921171" y="24234"/>
-                    <a:pt x="1921171" y="54129"/>
-                  </a:cubicBezTo>
-                  <a:lnTo>
-                    <a:pt x="1921171" y="157567"/>
-                  </a:lnTo>
-                  <a:cubicBezTo>
-                    <a:pt x="1921171" y="171923"/>
-                    <a:pt x="1915468" y="185691"/>
-                    <a:pt x="1905317" y="195842"/>
-                  </a:cubicBezTo>
-                  <a:cubicBezTo>
-                    <a:pt x="1895166" y="205993"/>
-                    <a:pt x="1881398" y="211696"/>
-                    <a:pt x="1867042" y="211696"/>
-                  </a:cubicBezTo>
-                  <a:lnTo>
-                    <a:pt x="54129" y="211696"/>
-                  </a:lnTo>
-                  <a:cubicBezTo>
-                    <a:pt x="24234" y="211696"/>
-                    <a:pt x="0" y="187462"/>
-                    <a:pt x="0" y="157567"/>
-                  </a:cubicBezTo>
-                  <a:lnTo>
-                    <a:pt x="0" y="54129"/>
-                  </a:lnTo>
-                  <a:cubicBezTo>
-                    <a:pt x="0" y="24234"/>
-                    <a:pt x="24234" y="0"/>
-                    <a:pt x="54129" y="0"/>
-                  </a:cubicBezTo>
-                  <a:close/>
-                </a:path>
-              </a:pathLst>
-            </a:custGeom>
-            <a:solidFill>
-              <a:srgbClr val="02B676"/>
-            </a:solidFill>
-          </p:spPr>
-          <p:txBody>
-            <a:bodyPr/>
-            <a:lstStyle/>
-            <a:p>
-              <a:endParaRPr lang="en-GB"/>
-            </a:p>
-          </p:txBody>
-        </p:sp>
-        <p:sp>
-          <p:nvSpPr>
-            <p:cNvPr id="4" name="TextBox 4"/>
-            <p:cNvSpPr txBox="1"/>
-            <p:nvPr/>
-          </p:nvSpPr>
-          <p:spPr>
-            <a:xfrm>
-              <a:off x="0" y="-104775"/>
-              <a:ext cx="1921171" cy="316471"/>
-            </a:xfrm>
-            <a:prstGeom prst="rect">
-              <a:avLst/>
-            </a:prstGeom>
-          </p:spPr>
-          <p:txBody>
-            <a:bodyPr lIns="50800" tIns="50800" rIns="50800" bIns="50800" rtlCol="0" anchor="ctr"/>
-            <a:lstStyle/>
-            <a:p>
-              <a:pPr algn="ctr">
-                <a:lnSpc>
-                  <a:spcPts val="4200"/>
-                </a:lnSpc>
-              </a:pPr>
-              <a:r>
-                <a:rPr lang="en-US" sz="3000" b="1">
-                  <a:solidFill>
-                    <a:srgbClr val="FFFFFF"/>
-                  </a:solidFill>
-                  <a:latin typeface="Telegraf 1 Bold"/>
-                  <a:ea typeface="Telegraf 1 Bold"/>
-                  <a:cs typeface="Telegraf 1 Bold"/>
-                  <a:sym typeface="Telegraf 1 Bold"/>
-                </a:rPr>
-                <a:t>Statistical Summary</a:t>
-              </a:r>
-            </a:p>
-          </p:txBody>
-        </p:sp>
-      </p:grpSp>
-      <p:grpSp>
-        <p:nvGrpSpPr>
-          <p:cNvPr id="5" name="Group 5"/>
-          <p:cNvGrpSpPr/>
-          <p:nvPr/>
-        </p:nvGrpSpPr>
-        <p:grpSpPr>
-          <a:xfrm>
-            <a:off x="9964855" y="1572946"/>
-            <a:ext cx="7294445" cy="803783"/>
-            <a:chOff x="0" y="0"/>
-            <a:chExt cx="1921171" cy="211696"/>
-          </a:xfrm>
-        </p:grpSpPr>
-        <p:sp>
-          <p:nvSpPr>
-            <p:cNvPr id="6" name="Freeform 6"/>
-            <p:cNvSpPr/>
-            <p:nvPr/>
-          </p:nvSpPr>
-          <p:spPr>
-            <a:xfrm>
-              <a:off x="0" y="0"/>
-              <a:ext cx="1921171" cy="211696"/>
-            </a:xfrm>
-            <a:custGeom>
-              <a:avLst/>
-              <a:gdLst/>
-              <a:ahLst/>
-              <a:cxnLst/>
-              <a:rect l="l" t="t" r="r" b="b"/>
-              <a:pathLst>
-                <a:path w="1921171" h="211696">
-                  <a:moveTo>
-                    <a:pt x="54129" y="0"/>
-                  </a:moveTo>
-                  <a:lnTo>
-                    <a:pt x="1867042" y="0"/>
-                  </a:lnTo>
-                  <a:cubicBezTo>
-                    <a:pt x="1896937" y="0"/>
-                    <a:pt x="1921171" y="24234"/>
-                    <a:pt x="1921171" y="54129"/>
-                  </a:cubicBezTo>
-                  <a:lnTo>
-                    <a:pt x="1921171" y="157567"/>
-                  </a:lnTo>
-                  <a:cubicBezTo>
-                    <a:pt x="1921171" y="171923"/>
-                    <a:pt x="1915468" y="185691"/>
-                    <a:pt x="1905317" y="195842"/>
-                  </a:cubicBezTo>
-                  <a:cubicBezTo>
-                    <a:pt x="1895166" y="205993"/>
-                    <a:pt x="1881398" y="211696"/>
-                    <a:pt x="1867042" y="211696"/>
-                  </a:cubicBezTo>
-                  <a:lnTo>
-                    <a:pt x="54129" y="211696"/>
-                  </a:lnTo>
-                  <a:cubicBezTo>
-                    <a:pt x="24234" y="211696"/>
-                    <a:pt x="0" y="187462"/>
-                    <a:pt x="0" y="157567"/>
-                  </a:cubicBezTo>
-                  <a:lnTo>
-                    <a:pt x="0" y="54129"/>
-                  </a:lnTo>
-                  <a:cubicBezTo>
-                    <a:pt x="0" y="24234"/>
-                    <a:pt x="24234" y="0"/>
-                    <a:pt x="54129" y="0"/>
-                  </a:cubicBezTo>
-                  <a:close/>
-                </a:path>
-              </a:pathLst>
-            </a:custGeom>
-            <a:solidFill>
-              <a:srgbClr val="02B676"/>
-            </a:solidFill>
-          </p:spPr>
-          <p:txBody>
-            <a:bodyPr/>
-            <a:lstStyle/>
-            <a:p>
-              <a:endParaRPr lang="en-GB"/>
-            </a:p>
-          </p:txBody>
-        </p:sp>
-        <p:sp>
-          <p:nvSpPr>
-            <p:cNvPr id="7" name="TextBox 7"/>
-            <p:cNvSpPr txBox="1"/>
-            <p:nvPr/>
-          </p:nvSpPr>
-          <p:spPr>
-            <a:xfrm>
-              <a:off x="0" y="-104775"/>
-              <a:ext cx="1921171" cy="316471"/>
-            </a:xfrm>
-            <a:prstGeom prst="rect">
-              <a:avLst/>
-            </a:prstGeom>
-          </p:spPr>
-          <p:txBody>
-            <a:bodyPr lIns="50800" tIns="50800" rIns="50800" bIns="50800" rtlCol="0" anchor="ctr"/>
-            <a:lstStyle/>
-            <a:p>
-              <a:pPr algn="ctr">
-                <a:lnSpc>
-                  <a:spcPts val="4200"/>
-                </a:lnSpc>
-              </a:pPr>
-              <a:r>
-                <a:rPr lang="en-US" sz="3000" b="1">
-                  <a:solidFill>
-                    <a:srgbClr val="FFFFFF"/>
-                  </a:solidFill>
-                  <a:latin typeface="Telegraf 1 Bold"/>
-                  <a:ea typeface="Telegraf 1 Bold"/>
-                  <a:cs typeface="Telegraf 1 Bold"/>
-                  <a:sym typeface="Telegraf 1 Bold"/>
-                </a:rPr>
-                <a:t>Correlation Heatmap</a:t>
-              </a:r>
-            </a:p>
-          </p:txBody>
-        </p:sp>
-      </p:grpSp>
-      <p:grpSp>
-        <p:nvGrpSpPr>
-          <p:cNvPr id="8" name="Group 8"/>
-          <p:cNvGrpSpPr/>
-          <p:nvPr/>
-        </p:nvGrpSpPr>
-        <p:grpSpPr>
-          <a:xfrm>
-            <a:off x="1028700" y="5673893"/>
-            <a:ext cx="7294445" cy="803783"/>
-            <a:chOff x="0" y="0"/>
-            <a:chExt cx="1921171" cy="211696"/>
-          </a:xfrm>
-        </p:grpSpPr>
-        <p:sp>
-          <p:nvSpPr>
-            <p:cNvPr id="9" name="Freeform 9"/>
-            <p:cNvSpPr/>
-            <p:nvPr/>
-          </p:nvSpPr>
-          <p:spPr>
-            <a:xfrm>
-              <a:off x="0" y="0"/>
-              <a:ext cx="1921171" cy="211696"/>
-            </a:xfrm>
-            <a:custGeom>
-              <a:avLst/>
-              <a:gdLst/>
-              <a:ahLst/>
-              <a:cxnLst/>
-              <a:rect l="l" t="t" r="r" b="b"/>
-              <a:pathLst>
-                <a:path w="1921171" h="211696">
-                  <a:moveTo>
-                    <a:pt x="54129" y="0"/>
-                  </a:moveTo>
-                  <a:lnTo>
-                    <a:pt x="1867042" y="0"/>
-                  </a:lnTo>
-                  <a:cubicBezTo>
-                    <a:pt x="1896937" y="0"/>
-                    <a:pt x="1921171" y="24234"/>
-                    <a:pt x="1921171" y="54129"/>
-                  </a:cubicBezTo>
-                  <a:lnTo>
-                    <a:pt x="1921171" y="157567"/>
-                  </a:lnTo>
-                  <a:cubicBezTo>
-                    <a:pt x="1921171" y="171923"/>
-                    <a:pt x="1915468" y="185691"/>
-                    <a:pt x="1905317" y="195842"/>
-                  </a:cubicBezTo>
-                  <a:cubicBezTo>
-                    <a:pt x="1895166" y="205993"/>
-                    <a:pt x="1881398" y="211696"/>
-                    <a:pt x="1867042" y="211696"/>
-                  </a:cubicBezTo>
-                  <a:lnTo>
-                    <a:pt x="54129" y="211696"/>
-                  </a:lnTo>
-                  <a:cubicBezTo>
-                    <a:pt x="24234" y="211696"/>
-                    <a:pt x="0" y="187462"/>
-                    <a:pt x="0" y="157567"/>
-                  </a:cubicBezTo>
-                  <a:lnTo>
-                    <a:pt x="0" y="54129"/>
-                  </a:lnTo>
-                  <a:cubicBezTo>
-                    <a:pt x="0" y="24234"/>
-                    <a:pt x="24234" y="0"/>
-                    <a:pt x="54129" y="0"/>
-                  </a:cubicBezTo>
-                  <a:close/>
-                </a:path>
-              </a:pathLst>
-            </a:custGeom>
-            <a:solidFill>
-              <a:srgbClr val="02B676"/>
-            </a:solidFill>
-          </p:spPr>
-          <p:txBody>
-            <a:bodyPr/>
-            <a:lstStyle/>
-            <a:p>
-              <a:endParaRPr lang="en-GB"/>
-            </a:p>
-          </p:txBody>
-        </p:sp>
-        <p:sp>
-          <p:nvSpPr>
-            <p:cNvPr id="10" name="TextBox 10"/>
-            <p:cNvSpPr txBox="1"/>
-            <p:nvPr/>
-          </p:nvSpPr>
-          <p:spPr>
-            <a:xfrm>
-              <a:off x="0" y="-104775"/>
-              <a:ext cx="1921171" cy="316471"/>
-            </a:xfrm>
-            <a:prstGeom prst="rect">
-              <a:avLst/>
-            </a:prstGeom>
-          </p:spPr>
-          <p:txBody>
-            <a:bodyPr lIns="50800" tIns="50800" rIns="50800" bIns="50800" rtlCol="0" anchor="ctr"/>
-            <a:lstStyle/>
-            <a:p>
-              <a:pPr algn="ctr">
-                <a:lnSpc>
-                  <a:spcPts val="4200"/>
-                </a:lnSpc>
-              </a:pPr>
-              <a:r>
-                <a:rPr lang="en-US" sz="3000" b="1">
-                  <a:solidFill>
-                    <a:srgbClr val="FFFFFF"/>
-                  </a:solidFill>
-                  <a:latin typeface="Telegraf 1 Bold"/>
-                  <a:ea typeface="Telegraf 1 Bold"/>
-                  <a:cs typeface="Telegraf 1 Bold"/>
-                  <a:sym typeface="Telegraf 1 Bold"/>
-                </a:rPr>
-                <a:t>Distribution Plot</a:t>
-              </a:r>
-            </a:p>
-          </p:txBody>
-        </p:sp>
-      </p:grpSp>
-      <p:sp>
-        <p:nvSpPr>
-          <p:cNvPr id="11" name="Freeform 11"/>
-          <p:cNvSpPr/>
-          <p:nvPr/>
-        </p:nvSpPr>
-        <p:spPr>
-          <a:xfrm>
-            <a:off x="1263102" y="2593447"/>
-            <a:ext cx="6825642" cy="2878396"/>
-          </a:xfrm>
-          <a:custGeom>
-            <a:avLst/>
-            <a:gdLst/>
-            <a:ahLst/>
-            <a:cxnLst/>
-            <a:rect l="l" t="t" r="r" b="b"/>
-            <a:pathLst>
-              <a:path w="6825642" h="2878396">
-                <a:moveTo>
-                  <a:pt x="0" y="0"/>
-                </a:moveTo>
-                <a:lnTo>
-                  <a:pt x="6825641" y="0"/>
-                </a:lnTo>
-                <a:lnTo>
-                  <a:pt x="6825641" y="2878395"/>
-                </a:lnTo>
-                <a:lnTo>
-                  <a:pt x="0" y="2878395"/>
-                </a:lnTo>
-                <a:lnTo>
-                  <a:pt x="0" y="0"/>
-                </a:lnTo>
-                <a:close/>
-              </a:path>
-            </a:pathLst>
-          </a:custGeom>
-          <a:blipFill>
-            <a:blip r:embed="rId2"/>
-            <a:stretch>
-              <a:fillRect/>
-            </a:stretch>
-          </a:blipFill>
-        </p:spPr>
-        <p:txBody>
-          <a:bodyPr/>
-          <a:lstStyle/>
-          <a:p>
-            <a:endParaRPr lang="en-GB"/>
-          </a:p>
-        </p:txBody>
-      </p:sp>
-      <p:sp>
-        <p:nvSpPr>
-          <p:cNvPr id="12" name="Freeform 12"/>
-          <p:cNvSpPr/>
-          <p:nvPr/>
-        </p:nvSpPr>
-        <p:spPr>
-          <a:xfrm>
-            <a:off x="2077019" y="6696751"/>
-            <a:ext cx="5197807" cy="3325122"/>
-          </a:xfrm>
-          <a:custGeom>
-            <a:avLst/>
-            <a:gdLst/>
-            <a:ahLst/>
-            <a:cxnLst/>
-            <a:rect l="l" t="t" r="r" b="b"/>
-            <a:pathLst>
-              <a:path w="5197807" h="3325122">
-                <a:moveTo>
-                  <a:pt x="0" y="0"/>
-                </a:moveTo>
-                <a:lnTo>
-                  <a:pt x="5197807" y="0"/>
-                </a:lnTo>
-                <a:lnTo>
-                  <a:pt x="5197807" y="3325122"/>
-                </a:lnTo>
-                <a:lnTo>
-                  <a:pt x="0" y="3325122"/>
-                </a:lnTo>
-                <a:lnTo>
-                  <a:pt x="0" y="0"/>
-                </a:lnTo>
-                <a:close/>
-              </a:path>
-            </a:pathLst>
-          </a:custGeom>
-          <a:blipFill>
-            <a:blip r:embed="rId3"/>
-            <a:stretch>
-              <a:fillRect/>
-            </a:stretch>
-          </a:blipFill>
-        </p:spPr>
-        <p:txBody>
-          <a:bodyPr/>
-          <a:lstStyle/>
-          <a:p>
-            <a:endParaRPr lang="en-GB"/>
-          </a:p>
-        </p:txBody>
-      </p:sp>
-      <p:sp>
-        <p:nvSpPr>
-          <p:cNvPr id="13" name="Freeform 13"/>
-          <p:cNvSpPr/>
-          <p:nvPr/>
-        </p:nvSpPr>
-        <p:spPr>
-          <a:xfrm>
-            <a:off x="11262471" y="2593447"/>
-            <a:ext cx="4699212" cy="3948795"/>
-          </a:xfrm>
-          <a:custGeom>
-            <a:avLst/>
-            <a:gdLst/>
-            <a:ahLst/>
-            <a:cxnLst/>
-            <a:rect l="l" t="t" r="r" b="b"/>
-            <a:pathLst>
-              <a:path w="4699212" h="3948795">
-                <a:moveTo>
-                  <a:pt x="0" y="0"/>
-                </a:moveTo>
-                <a:lnTo>
-                  <a:pt x="4699213" y="0"/>
-                </a:lnTo>
-                <a:lnTo>
-                  <a:pt x="4699213" y="3948795"/>
-                </a:lnTo>
-                <a:lnTo>
-                  <a:pt x="0" y="3948795"/>
-                </a:lnTo>
-                <a:lnTo>
-                  <a:pt x="0" y="0"/>
-                </a:lnTo>
-                <a:close/>
-              </a:path>
-            </a:pathLst>
-          </a:custGeom>
-          <a:blipFill>
-            <a:blip r:embed="rId4"/>
-            <a:stretch>
-              <a:fillRect/>
-            </a:stretch>
-          </a:blipFill>
-        </p:spPr>
-        <p:txBody>
-          <a:bodyPr/>
-          <a:lstStyle/>
-          <a:p>
-            <a:endParaRPr lang="en-GB"/>
-          </a:p>
-        </p:txBody>
-      </p:sp>
-      <p:sp>
-        <p:nvSpPr>
-          <p:cNvPr id="14" name="TextBox 14"/>
-          <p:cNvSpPr txBox="1"/>
-          <p:nvPr/>
-        </p:nvSpPr>
-        <p:spPr>
-          <a:xfrm>
-            <a:off x="1757527" y="499824"/>
-            <a:ext cx="14772946" cy="1073123"/>
-          </a:xfrm>
-          <a:prstGeom prst="rect">
-            <a:avLst/>
-          </a:prstGeom>
-        </p:spPr>
-        <p:txBody>
-          <a:bodyPr lIns="0" tIns="0" rIns="0" bIns="0" rtlCol="0" anchor="t">
-            <a:spAutoFit/>
-          </a:bodyPr>
-          <a:lstStyle/>
-          <a:p>
-            <a:pPr algn="ctr">
-              <a:lnSpc>
-                <a:spcPts val="6999"/>
-              </a:lnSpc>
-            </a:pPr>
-            <a:r>
-              <a:rPr lang="en-US" sz="6999" spc="342">
-                <a:solidFill>
-                  <a:srgbClr val="290606"/>
-                </a:solidFill>
-                <a:latin typeface="Cheddar"/>
-                <a:ea typeface="Cheddar"/>
-                <a:cs typeface="Cheddar"/>
-                <a:sym typeface="Cheddar"/>
-              </a:rPr>
-              <a:t>EXPLORATORY DATA ANALYSIS (EDA)</a:t>
-            </a:r>
-          </a:p>
-        </p:txBody>
-      </p:sp>
-      <p:grpSp>
-        <p:nvGrpSpPr>
-          <p:cNvPr id="15" name="Group 15"/>
-          <p:cNvGrpSpPr/>
-          <p:nvPr/>
-        </p:nvGrpSpPr>
-        <p:grpSpPr>
-          <a:xfrm>
-            <a:off x="9964855" y="7166201"/>
-            <a:ext cx="7294445" cy="2593758"/>
-            <a:chOff x="0" y="0"/>
-            <a:chExt cx="3181107" cy="1131138"/>
-          </a:xfrm>
-        </p:grpSpPr>
-        <p:sp>
-          <p:nvSpPr>
-            <p:cNvPr id="16" name="Freeform 16"/>
-            <p:cNvSpPr/>
-            <p:nvPr/>
-          </p:nvSpPr>
-          <p:spPr>
-            <a:xfrm>
-              <a:off x="0" y="0"/>
-              <a:ext cx="3181107" cy="1131138"/>
-            </a:xfrm>
-            <a:custGeom>
-              <a:avLst/>
-              <a:gdLst/>
-              <a:ahLst/>
-              <a:cxnLst/>
-              <a:rect l="l" t="t" r="r" b="b"/>
-              <a:pathLst>
-                <a:path w="3181107" h="1131138">
-                  <a:moveTo>
-                    <a:pt x="10613" y="0"/>
-                  </a:moveTo>
-                  <a:lnTo>
-                    <a:pt x="3170493" y="0"/>
-                  </a:lnTo>
-                  <a:cubicBezTo>
-                    <a:pt x="3173308" y="0"/>
-                    <a:pt x="3176008" y="1118"/>
-                    <a:pt x="3177998" y="3109"/>
-                  </a:cubicBezTo>
-                  <a:cubicBezTo>
-                    <a:pt x="3179989" y="5099"/>
-                    <a:pt x="3181107" y="7799"/>
-                    <a:pt x="3181107" y="10613"/>
-                  </a:cubicBezTo>
-                  <a:lnTo>
-                    <a:pt x="3181107" y="1120524"/>
-                  </a:lnTo>
-                  <a:cubicBezTo>
-                    <a:pt x="3181107" y="1123339"/>
-                    <a:pt x="3179989" y="1126039"/>
-                    <a:pt x="3177998" y="1128029"/>
-                  </a:cubicBezTo>
-                  <a:cubicBezTo>
-                    <a:pt x="3176008" y="1130019"/>
-                    <a:pt x="3173308" y="1131138"/>
-                    <a:pt x="3170493" y="1131138"/>
-                  </a:cubicBezTo>
-                  <a:lnTo>
-                    <a:pt x="10613" y="1131138"/>
-                  </a:lnTo>
-                  <a:cubicBezTo>
-                    <a:pt x="7799" y="1131138"/>
-                    <a:pt x="5099" y="1130019"/>
-                    <a:pt x="3109" y="1128029"/>
-                  </a:cubicBezTo>
-                  <a:cubicBezTo>
-                    <a:pt x="1118" y="1126039"/>
-                    <a:pt x="0" y="1123339"/>
-                    <a:pt x="0" y="1120524"/>
-                  </a:cubicBezTo>
-                  <a:lnTo>
-                    <a:pt x="0" y="10613"/>
-                  </a:lnTo>
-                  <a:cubicBezTo>
-                    <a:pt x="0" y="7799"/>
-                    <a:pt x="1118" y="5099"/>
-                    <a:pt x="3109" y="3109"/>
-                  </a:cubicBezTo>
-                  <a:cubicBezTo>
-                    <a:pt x="5099" y="1118"/>
-                    <a:pt x="7799" y="0"/>
-                    <a:pt x="10613" y="0"/>
-                  </a:cubicBezTo>
-                  <a:close/>
-                </a:path>
-              </a:pathLst>
-            </a:custGeom>
-            <a:solidFill>
-              <a:srgbClr val="02B676">
-                <a:alpha val="69804"/>
-              </a:srgbClr>
-            </a:solidFill>
-          </p:spPr>
-          <p:txBody>
-            <a:bodyPr/>
-            <a:lstStyle/>
-            <a:p>
-              <a:endParaRPr lang="en-GB"/>
-            </a:p>
-          </p:txBody>
-        </p:sp>
-        <p:sp>
-          <p:nvSpPr>
-            <p:cNvPr id="17" name="TextBox 17"/>
-            <p:cNvSpPr txBox="1"/>
-            <p:nvPr/>
-          </p:nvSpPr>
-          <p:spPr>
-            <a:xfrm>
-              <a:off x="0" y="-38100"/>
-              <a:ext cx="3181107" cy="1169238"/>
-            </a:xfrm>
-            <a:prstGeom prst="rect">
-              <a:avLst/>
-            </a:prstGeom>
-          </p:spPr>
-          <p:txBody>
-            <a:bodyPr lIns="80497" tIns="80497" rIns="80497" bIns="80497" rtlCol="0" anchor="ctr"/>
-            <a:lstStyle/>
-            <a:p>
-              <a:pPr algn="ctr">
-                <a:lnSpc>
-                  <a:spcPts val="3599"/>
-                </a:lnSpc>
-              </a:pPr>
-              <a:endParaRPr/>
-            </a:p>
-          </p:txBody>
-        </p:sp>
-      </p:grpSp>
-      <p:grpSp>
-        <p:nvGrpSpPr>
-          <p:cNvPr id="18" name="Group 18"/>
-          <p:cNvGrpSpPr/>
-          <p:nvPr/>
-        </p:nvGrpSpPr>
-        <p:grpSpPr>
-          <a:xfrm>
-            <a:off x="9495405" y="6696751"/>
-            <a:ext cx="938900" cy="938900"/>
-            <a:chOff x="0" y="0"/>
-            <a:chExt cx="1251867" cy="1251867"/>
-          </a:xfrm>
-        </p:grpSpPr>
-        <p:grpSp>
-          <p:nvGrpSpPr>
-            <p:cNvPr id="19" name="Group 19"/>
-            <p:cNvGrpSpPr/>
-            <p:nvPr/>
-          </p:nvGrpSpPr>
-          <p:grpSpPr>
-            <a:xfrm>
-              <a:off x="0" y="0"/>
-              <a:ext cx="1251867" cy="1251867"/>
-              <a:chOff x="0" y="0"/>
-              <a:chExt cx="812800" cy="812800"/>
-            </a:xfrm>
-          </p:grpSpPr>
-          <p:sp>
-            <p:nvSpPr>
-              <p:cNvPr id="20" name="Freeform 20"/>
-              <p:cNvSpPr/>
-              <p:nvPr/>
-            </p:nvSpPr>
-            <p:spPr>
-              <a:xfrm>
-                <a:off x="0" y="0"/>
-                <a:ext cx="812800" cy="812800"/>
-              </a:xfrm>
-              <a:custGeom>
-                <a:avLst/>
-                <a:gdLst/>
-                <a:ahLst/>
-                <a:cxnLst/>
-                <a:rect l="l" t="t" r="r" b="b"/>
-                <a:pathLst>
-                  <a:path w="812800" h="812800">
-                    <a:moveTo>
-                      <a:pt x="406400" y="0"/>
-                    </a:moveTo>
-                    <a:cubicBezTo>
-                      <a:pt x="181951" y="0"/>
-                      <a:pt x="0" y="181951"/>
-                      <a:pt x="0" y="406400"/>
-                    </a:cubicBezTo>
-                    <a:cubicBezTo>
-                      <a:pt x="0" y="630849"/>
-                      <a:pt x="181951" y="812800"/>
-                      <a:pt x="406400" y="812800"/>
-                    </a:cubicBezTo>
-                    <a:cubicBezTo>
-                      <a:pt x="630849" y="812800"/>
-                      <a:pt x="812800" y="630849"/>
-                      <a:pt x="812800" y="406400"/>
-                    </a:cubicBezTo>
-                    <a:cubicBezTo>
-                      <a:pt x="812800" y="181951"/>
-                      <a:pt x="630849" y="0"/>
-                      <a:pt x="406400" y="0"/>
-                    </a:cubicBezTo>
-                    <a:close/>
-                  </a:path>
-                </a:pathLst>
-              </a:custGeom>
-              <a:solidFill>
-                <a:srgbClr val="EDEBE6"/>
-              </a:solidFill>
-              <a:ln w="38100" cap="sq">
-                <a:solidFill>
-                  <a:srgbClr val="292828"/>
-                </a:solidFill>
-                <a:prstDash val="solid"/>
-                <a:miter/>
-              </a:ln>
-            </p:spPr>
-            <p:txBody>
-              <a:bodyPr/>
-              <a:lstStyle/>
-              <a:p>
-                <a:endParaRPr lang="en-GB"/>
-              </a:p>
-            </p:txBody>
-          </p:sp>
-          <p:sp>
-            <p:nvSpPr>
-              <p:cNvPr id="21" name="TextBox 21"/>
-              <p:cNvSpPr txBox="1"/>
-              <p:nvPr/>
-            </p:nvSpPr>
-            <p:spPr>
-              <a:xfrm>
-                <a:off x="76200" y="28575"/>
-                <a:ext cx="660400" cy="708025"/>
-              </a:xfrm>
-              <a:prstGeom prst="rect">
-                <a:avLst/>
-              </a:prstGeom>
-            </p:spPr>
-            <p:txBody>
-              <a:bodyPr lIns="50800" tIns="50800" rIns="50800" bIns="50800" rtlCol="0" anchor="ctr"/>
-              <a:lstStyle/>
-              <a:p>
-                <a:pPr algn="ctr">
-                  <a:lnSpc>
-                    <a:spcPts val="5399"/>
-                  </a:lnSpc>
-                </a:pPr>
-                <a:endParaRPr/>
-              </a:p>
-            </p:txBody>
-          </p:sp>
-        </p:grpSp>
-      </p:grpSp>
-      <p:sp>
-        <p:nvSpPr>
-          <p:cNvPr id="22" name="TextBox 22"/>
-          <p:cNvSpPr txBox="1"/>
-          <p:nvPr/>
-        </p:nvSpPr>
-        <p:spPr>
-          <a:xfrm>
-            <a:off x="10288662" y="7418140"/>
-            <a:ext cx="6646830" cy="2108929"/>
-          </a:xfrm>
-          <a:prstGeom prst="rect">
-            <a:avLst/>
-          </a:prstGeom>
-        </p:spPr>
-        <p:txBody>
-          <a:bodyPr lIns="0" tIns="0" rIns="0" bIns="0" rtlCol="0" anchor="t">
-            <a:spAutoFit/>
-          </a:bodyPr>
-          <a:lstStyle/>
-          <a:p>
-            <a:pPr marL="518158" lvl="1" indent="-259079" algn="just">
-              <a:lnSpc>
-                <a:spcPts val="2399"/>
-              </a:lnSpc>
-              <a:buFont typeface="Arial"/>
-              <a:buChar char="•"/>
-            </a:pPr>
-            <a:r>
-              <a:rPr lang="en-US" sz="2399" b="1" spc="117">
-                <a:solidFill>
-                  <a:srgbClr val="FFFFFF"/>
-                </a:solidFill>
-                <a:latin typeface="Telegraf 1 Bold"/>
-                <a:ea typeface="Telegraf 1 Bold"/>
-                <a:cs typeface="Telegraf 1 Bold"/>
-                <a:sym typeface="Telegraf 1 Bold"/>
-              </a:rPr>
-              <a:t>Robust Dataset: </a:t>
-            </a:r>
-            <a:r>
-              <a:rPr lang="en-US" sz="2399" spc="117">
-                <a:solidFill>
-                  <a:srgbClr val="FFFFFF"/>
-                </a:solidFill>
-                <a:latin typeface="Telegraf 1"/>
-                <a:ea typeface="Telegraf 1"/>
-                <a:cs typeface="Telegraf 1"/>
-                <a:sym typeface="Telegraf 1"/>
-              </a:rPr>
-              <a:t>48,204 data rows with an average volume of ~3,260 cars per hour.</a:t>
-            </a:r>
-          </a:p>
-          <a:p>
-            <a:pPr marL="518158" lvl="1" indent="-259079" algn="just">
-              <a:lnSpc>
-                <a:spcPts val="2399"/>
-              </a:lnSpc>
-              <a:buFont typeface="Arial"/>
-              <a:buChar char="•"/>
-            </a:pPr>
-            <a:r>
-              <a:rPr lang="en-US" sz="2399" b="1" spc="117">
-                <a:solidFill>
-                  <a:srgbClr val="FFFFFF"/>
-                </a:solidFill>
-                <a:latin typeface="Telegraf 1 Bold"/>
-                <a:ea typeface="Telegraf 1 Bold"/>
-                <a:cs typeface="Telegraf 1 Bold"/>
-                <a:sym typeface="Telegraf 1 Bold"/>
-              </a:rPr>
-              <a:t>Distinct Traffic Peaks: </a:t>
-            </a:r>
-            <a:r>
-              <a:rPr lang="en-US" sz="2399" spc="117">
-                <a:solidFill>
-                  <a:srgbClr val="FFFFFF"/>
-                </a:solidFill>
-                <a:latin typeface="Telegraf 1"/>
-                <a:ea typeface="Telegraf 1"/>
-                <a:cs typeface="Telegraf 1"/>
-                <a:sym typeface="Telegraf 1"/>
-              </a:rPr>
-              <a:t>Volume distribution is uneven.</a:t>
-            </a:r>
-          </a:p>
-          <a:p>
-            <a:pPr marL="518158" lvl="1" indent="-259079" algn="just">
-              <a:lnSpc>
-                <a:spcPts val="2399"/>
-              </a:lnSpc>
-              <a:buFont typeface="Arial"/>
-              <a:buChar char="•"/>
-            </a:pPr>
-            <a:r>
-              <a:rPr lang="en-US" sz="2399" b="1" spc="117">
-                <a:solidFill>
-                  <a:srgbClr val="FFFFFF"/>
-                </a:solidFill>
-                <a:latin typeface="Telegraf 1 Bold"/>
-                <a:ea typeface="Telegraf 1 Bold"/>
-                <a:cs typeface="Telegraf 1 Bold"/>
-                <a:sym typeface="Telegraf 1 Bold"/>
-              </a:rPr>
-              <a:t>Low Multicollinearity: </a:t>
-            </a:r>
-            <a:r>
-              <a:rPr lang="en-US" sz="2399" spc="117">
-                <a:solidFill>
-                  <a:srgbClr val="FFFFFF"/>
-                </a:solidFill>
-                <a:latin typeface="Telegraf 1"/>
-                <a:ea typeface="Telegraf 1"/>
-                <a:cs typeface="Telegraf 1"/>
-                <a:sym typeface="Telegraf 1"/>
-              </a:rPr>
-              <a:t>No redundant data to confuse the model. </a:t>
-            </a:r>
-          </a:p>
-        </p:txBody>
-      </p:sp>
-    </p:spTree>
-  </p:cSld>
-  <p:clrMapOvr>
-    <a:masterClrMapping/>
-  </p:clrMapOvr>
-</p:sld>
-</file>
-
-<file path=ppt/slides/slide4.xml><?xml version="1.0" encoding="utf-8"?>
-<p:sld xmlns:a="http://schemas.openxmlformats.org/drawingml/2006/main" xmlns:r="http://schemas.openxmlformats.org/officeDocument/2006/relationships" xmlns:p="http://schemas.openxmlformats.org/presentationml/2006/main">
-  <p:cSld>
-    <p:bg>
-      <p:bgPr>
-        <a:solidFill>
-          <a:srgbClr val="EEF4F3"/>
-        </a:solidFill>
-        <a:effectLst/>
-      </p:bgPr>
-    </p:bg>
-    <p:spTree>
-      <p:nvGrpSpPr>
-        <p:cNvPr id="1" name=""/>
-        <p:cNvGrpSpPr/>
-        <p:nvPr/>
-      </p:nvGrpSpPr>
-      <p:grpSpPr>
-        <a:xfrm>
-          <a:off x="0" y="0"/>
-          <a:ext cx="0" cy="0"/>
-          <a:chOff x="0" y="0"/>
-          <a:chExt cx="0" cy="0"/>
-        </a:xfrm>
-      </p:grpSpPr>
       <p:sp>
         <p:nvSpPr>
           <p:cNvPr id="2" name="Freeform 2"/>
@@ -6738,7 +5738,7 @@
 </p:sld>
 </file>
 
-<file path=ppt/slides/slide5.xml><?xml version="1.0" encoding="utf-8"?>
+<file path=ppt/slides/slide4.xml><?xml version="1.0" encoding="utf-8"?>
 <p:sld xmlns:a="http://schemas.openxmlformats.org/drawingml/2006/main" xmlns:r="http://schemas.openxmlformats.org/officeDocument/2006/relationships" xmlns:p="http://schemas.openxmlformats.org/presentationml/2006/main">
   <p:cSld>
     <p:bg>
@@ -6967,7 +5967,7 @@
 </p:sld>
 </file>
 
-<file path=ppt/slides/slide6.xml><?xml version="1.0" encoding="utf-8"?>
+<file path=ppt/slides/slide5.xml><?xml version="1.0" encoding="utf-8"?>
 <p:sld xmlns:a="http://schemas.openxmlformats.org/drawingml/2006/main" xmlns:r="http://schemas.openxmlformats.org/officeDocument/2006/relationships" xmlns:p="http://schemas.openxmlformats.org/presentationml/2006/main">
   <p:cSld>
     <p:bg>
@@ -9702,7 +8702,7 @@
 </p:sld>
 </file>
 
-<file path=ppt/slides/slide7.xml><?xml version="1.0" encoding="utf-8"?>
+<file path=ppt/slides/slide6.xml><?xml version="1.0" encoding="utf-8"?>
 <p:sld xmlns:a="http://schemas.openxmlformats.org/drawingml/2006/main" xmlns:r="http://schemas.openxmlformats.org/officeDocument/2006/relationships" xmlns:p="http://schemas.openxmlformats.org/presentationml/2006/main">
   <p:cSld>
     <p:bg>
